--- a/docs/ppt-book/projets/Exercices-PowerPoint.pptx
+++ b/docs/ppt-book/projets/Exercices-PowerPoint.pptx
@@ -11,9 +11,10 @@
     <p:sldId id="259" r:id="rId5"/>
     <p:sldId id="260" r:id="rId6"/>
     <p:sldId id="261" r:id="rId7"/>
+    <p:sldId id="262" r:id="rId8"/>
   </p:sldIdLst>
   <p:notesMasterIdLst>
-    <p:notesMasterId r:id="rId8"/>
+    <p:notesMasterId r:id="rId9"/>
   </p:notesMasterIdLst>
   <p:sldSz cx="9144000" cy="5143500"/>
   <p:notesSz cx="5143500" cy="9144000"/>
@@ -112,7 +113,7 @@
   <p:extLst>
     <p:ext uri="{521415D9-36F7-43E2-AB2F-B90AF26B5E84}">
       <p14:sectionLst xmlns:p14="http://schemas.microsoft.com/office/powerpoint/2010/main">
-        <p14:section name="التمارين" id="{7b314422-30be-e526-bf74-8054a37d286b}">
+        <p14:section name="التمارين" id="{fd823f4c-b283-7601-4ea0-dbf813fc2cdd}">
           <p14:sldIdLst>
             <p14:sldId id="256"/>
             <p14:sldId id="257"/>
@@ -120,6 +121,7 @@
             <p14:sldId id="259"/>
             <p14:sldId id="260"/>
             <p14:sldId id="261"/>
+            <p14:sldId id="262"/>
           </p14:sldIdLst>
         </p14:section>
       </p14:sectionLst>
@@ -990,6 +992,94 @@
             <a:fld id="{F7021451-1387-4CA6-816F-3879F97B5CBC}" type="slidenum">
               <a:rPr lang="en-US"/>
               <a:t>6</a:t>
+            </a:fld>
+            <a:endParaRPr lang="en-US"/>
+          </a:p>
+        </p:txBody>
+      </p:sp>
+    </p:spTree>
+    <p:extLst>
+      <p:ext uri="{BB962C8B-B14F-4D97-AF65-F5344CB8AC3E}">
+        <p14:creationId xmlns:p14="http://schemas.microsoft.com/office/powerpoint/2010/main" val="1024086991"/>
+      </p:ext>
+    </p:extLst>
+  </p:cSld>
+  <p:clrMapOvr>
+    <a:masterClrMapping/>
+  </p:clrMapOvr>
+</p:notes>
+</file>
+
+<file path=ppt/notesSlides/notesSlide7.xml><?xml version="1.0" encoding="utf-8"?>
+<p:notes xmlns:a="http://schemas.openxmlformats.org/drawingml/2006/main" xmlns:r="http://schemas.openxmlformats.org/officeDocument/2006/relationships" xmlns:p="http://schemas.openxmlformats.org/presentationml/2006/main">
+  <p:cSld>
+    <p:spTree>
+      <p:nvGrpSpPr>
+        <p:cNvPr id="1" name=""/>
+        <p:cNvGrpSpPr/>
+        <p:nvPr/>
+      </p:nvGrpSpPr>
+      <p:grpSpPr>
+        <a:xfrm>
+          <a:off x="0" y="0"/>
+          <a:ext cx="0" cy="0"/>
+          <a:chOff x="0" y="0"/>
+          <a:chExt cx="0" cy="0"/>
+        </a:xfrm>
+      </p:grpSpPr>
+      <p:sp>
+        <p:nvSpPr>
+          <p:cNvPr id="2" name="Slide Image Placeholder 1"/>
+          <p:cNvSpPr>
+            <a:spLocks noGrp="1" noRot="1" noChangeAspect="1"/>
+          </p:cNvSpPr>
+          <p:nvPr>
+            <p:ph type="sldImg"/>
+          </p:nvPr>
+        </p:nvSpPr>
+        <p:spPr/>
+      </p:sp>
+      <p:sp>
+        <p:nvSpPr>
+          <p:cNvPr id="3" name="Notes Placeholder 2"/>
+          <p:cNvSpPr>
+            <a:spLocks noGrp="1"/>
+          </p:cNvSpPr>
+          <p:nvPr>
+            <p:ph type="body" idx="1"/>
+          </p:nvPr>
+        </p:nvSpPr>
+        <p:spPr/>
+        <p:txBody>
+          <a:bodyPr/>
+          <a:lstStyle/>
+          <a:p>
+            <a:r>
+              <a:rPr lang="en-US" dirty="0"/>
+              <a:t/>
+            </a:r>
+            <a:endParaRPr lang="en-US" dirty="0"/>
+          </a:p>
+        </p:txBody>
+      </p:sp>
+      <p:sp>
+        <p:nvSpPr>
+          <p:cNvPr id="4" name="Slide Number Placeholder 3"/>
+          <p:cNvSpPr>
+            <a:spLocks noGrp="1"/>
+          </p:cNvSpPr>
+          <p:nvPr>
+            <p:ph type="sldNum" sz="quarter" idx="10"/>
+          </p:nvPr>
+        </p:nvSpPr>
+        <p:spPr/>
+        <p:txBody>
+          <a:bodyPr/>
+          <a:lstStyle/>
+          <a:p>
+            <a:fld id="{F7021451-1387-4CA6-816F-3879F97B5CBC}" type="slidenum">
+              <a:rPr lang="en-US"/>
+              <a:t>7</a:t>
             </a:fld>
             <a:endParaRPr lang="en-US"/>
           </a:p>
@@ -1890,7 +1980,7 @@
                   <a:schemeClr val="accent2"/>
                 </a:solidFill>
               </a:rPr>
-              <a:t>تمرين لكل فصل من الفصول 3 إلى 10</a:t>
+              <a:t>تمرين لكل فصل تطبيقي من الفصول 3 إلى 11</a:t>
             </a:r>
             <a:endParaRPr lang="en-US" sz="2000" dirty="0"/>
           </a:p>
@@ -3499,7 +3589,298 @@
                   <a:schemeClr val="tx2"/>
                 </a:solidFill>
               </a:rPr>
-              <a:t>تمرين الفصلين 9 و10: الانتقال والحركة</a:t>
+              <a:t>النتائج</a:t>
+            </a:r>
+            <a:endParaRPr lang="en-US" sz="3000" dirty="0"/>
+          </a:p>
+        </p:txBody>
+      </p:sp>
+      <p:sp>
+        <p:nvSpPr>
+          <p:cNvPr id="3" name="Text 1"/>
+          <p:cNvSpPr txBox="1"/>
+          <p:nvPr/>
+        </p:nvSpPr>
+        <p:spPr>
+          <a:xfrm>
+            <a:off x="457200" y="1097280"/>
+            <a:ext cx="5120640" cy="1828800"/>
+          </a:xfrm>
+          <a:prstGeom prst="rect">
+            <a:avLst/>
+          </a:prstGeom>
+          <a:noFill/>
+          <a:ln/>
+        </p:spPr>
+        <p:txBody>
+          <a:bodyPr wrap="square" rtlCol="0" anchor="ctr"/>
+          <a:lstStyle/>
+          <a:p>
+            <a:pPr rtl="1" algn="r" indent="0" marL="0">
+              <a:buNone/>
+            </a:pPr>
+            <a:r>
+              <a:rPr lang="en-US" sz="1200" dirty="0">
+                <a:solidFill>
+                  <a:srgbClr val="8C8C8C"/>
+                </a:solidFill>
+              </a:rPr>
+              <a:t>خلال هذه السنة حققت الشركة نتائج جيدة جدا حيث ارتفعت المبيعات بنسبة 25 بالمائة مقارنة بالسنة الماضية كما تحسن رضا الزبائن وتم فتح فرعين جديدين في مدينتين مختلفتين وانضم إلى الفريق موظفون جدد في قسم المبيعات والتسويق.</a:t>
+            </a:r>
+            <a:endParaRPr lang="en-US" sz="1200" dirty="0"/>
+          </a:p>
+        </p:txBody>
+      </p:sp>
+      <p:sp>
+        <p:nvSpPr>
+          <p:cNvPr id="4" name="Shape 2"/>
+          <p:cNvSpPr/>
+          <p:nvPr/>
+        </p:nvSpPr>
+        <p:spPr>
+          <a:xfrm>
+            <a:off x="5852160" y="1188720"/>
+            <a:ext cx="1280160" cy="914400"/>
+          </a:xfrm>
+          <a:prstGeom prst="rect">
+            <a:avLst/>
+          </a:prstGeom>
+          <a:solidFill>
+            <a:srgbClr val="7030A0"/>
+          </a:solidFill>
+          <a:ln w="12700">
+            <a:solidFill>
+              <a:srgbClr val="7030A0"/>
+            </a:solidFill>
+            <a:prstDash val="solid"/>
+          </a:ln>
+        </p:spPr>
+      </p:sp>
+      <p:sp>
+        <p:nvSpPr>
+          <p:cNvPr id="5" name="Shape 3"/>
+          <p:cNvSpPr/>
+          <p:nvPr/>
+        </p:nvSpPr>
+        <p:spPr>
+          <a:xfrm>
+            <a:off x="7406640" y="1920240"/>
+            <a:ext cx="1097280" cy="1097280"/>
+          </a:xfrm>
+          <a:prstGeom prst="ellipse">
+            <a:avLst/>
+          </a:prstGeom>
+          <a:solidFill>
+            <a:srgbClr val="00B050"/>
+          </a:solidFill>
+          <a:ln w="12700">
+            <a:solidFill>
+              <a:srgbClr val="00B050"/>
+            </a:solidFill>
+            <a:prstDash val="solid"/>
+          </a:ln>
+        </p:spPr>
+      </p:sp>
+      <p:sp>
+        <p:nvSpPr>
+          <p:cNvPr id="6" name="Shape 4"/>
+          <p:cNvSpPr/>
+          <p:nvPr/>
+        </p:nvSpPr>
+        <p:spPr>
+          <a:xfrm>
+            <a:off x="6309360" y="2743200"/>
+            <a:ext cx="822960" cy="822960"/>
+          </a:xfrm>
+          <a:prstGeom prst="rect">
+            <a:avLst/>
+          </a:prstGeom>
+          <a:solidFill>
+            <a:srgbClr val="FFC000"/>
+          </a:solidFill>
+          <a:ln w="12700">
+            <a:solidFill>
+              <a:srgbClr val="FFC000"/>
+            </a:solidFill>
+            <a:prstDash val="solid"/>
+          </a:ln>
+        </p:spPr>
+      </p:sp>
+      <p:sp>
+        <p:nvSpPr>
+          <p:cNvPr id="7" name="Text 5"/>
+          <p:cNvSpPr txBox="1"/>
+          <p:nvPr/>
+        </p:nvSpPr>
+        <p:spPr>
+          <a:xfrm>
+            <a:off x="914400" y="3017520"/>
+            <a:ext cx="1463040" cy="548640"/>
+          </a:xfrm>
+          <a:prstGeom prst="rect">
+            <a:avLst/>
+          </a:prstGeom>
+          <a:noFill/>
+          <a:ln/>
+        </p:spPr>
+        <p:txBody>
+          <a:bodyPr wrap="square" rtlCol="0" anchor="ctr"/>
+          <a:lstStyle/>
+          <a:p>
+            <a:pPr indent="0" marL="0">
+              <a:buNone/>
+            </a:pPr>
+            <a:r>
+              <a:rPr lang="en-US" sz="1400" dirty="0">
+                <a:solidFill>
+                  <a:srgbClr val="FF0000"/>
+                </a:solidFill>
+              </a:rPr>
+              <a:t>+25 %</a:t>
+            </a:r>
+            <a:endParaRPr lang="en-US" sz="1400" dirty="0"/>
+          </a:p>
+        </p:txBody>
+      </p:sp>
+      <p:sp>
+        <p:nvSpPr>
+          <p:cNvPr id="8" name="Text 6"/>
+          <p:cNvSpPr txBox="1"/>
+          <p:nvPr/>
+        </p:nvSpPr>
+        <p:spPr>
+          <a:xfrm>
+            <a:off x="457200" y="4069080"/>
+            <a:ext cx="8229600" cy="594360"/>
+          </a:xfrm>
+          <a:prstGeom prst="rect">
+            <a:avLst/>
+          </a:prstGeom>
+          <a:noFill/>
+          <a:ln/>
+        </p:spPr>
+        <p:txBody>
+          <a:bodyPr wrap="square" rtlCol="0" anchor="ctr"/>
+          <a:lstStyle/>
+          <a:p>
+            <a:pPr rtl="1" algn="r" indent="0" marL="0">
+              <a:buNone/>
+            </a:pPr>
+            <a:r>
+              <a:rPr lang="en-US" sz="1200" i="1" dirty="0">
+                <a:solidFill>
+                  <a:srgbClr val="595959"/>
+                </a:solidFill>
+              </a:rPr>
+              <a:t>المطلوب: حسن هذه الشريحة بقواعد الفصل 9: عنوان يقول الرسالة، ورقم كبير، وثلاث بطاقات محاذية، ولا نص أصغر من 18.</a:t>
+            </a:r>
+            <a:endParaRPr lang="en-US" sz="1200" dirty="0"/>
+          </a:p>
+        </p:txBody>
+      </p:sp>
+      <p:sp>
+        <p:nvSpPr>
+          <p:cNvPr id="25" name="Slide Number Placeholder 0"/>
+          <p:cNvSpPr>
+            <a:spLocks noGrp="1"/>
+          </p:cNvSpPr>
+          <p:nvPr>
+            <p:ph type="sldNum" sz="quarter" idx="4294967295"/>
+          </p:nvPr>
+        </p:nvSpPr>
+        <p:spPr>
+          <a:xfrm>
+            <a:off x="457200" y="4754880"/>
+            <a:ext cx="548640" cy="274320"/>
+          </a:xfrm>
+          <a:prstGeom prst="rect">
+            <a:avLst/>
+          </a:prstGeom>
+          <a:extLst>
+            <a:ext uri="{C572A759-6A51-4108-AA02-DFA0A04FC94B}">
+              <ma14:wrappingTextBoxFlag xmlns:ma14="http://schemas.microsoft.com/office/mac/drawingml/2011/main" val="0"/>
+            </a:ext>
+          </a:extLst>
+        </p:spPr>
+        <p:txBody>
+          <a:bodyPr/>
+          <a:lstStyle>
+            <a:lvl1pPr>
+              <a:defRPr sz="1000">
+                <a:solidFill>
+                  <a:srgbClr val="7F7F7F"/>
+                </a:solidFill>
+              </a:defRPr>
+            </a:lvl1pPr>
+          </a:lstStyle>
+          <a:p>
+            <a:pPr algn="l"/>
+            <a:fld id="{F7021451-1387-4CA6-816F-3879F97B5CBC}" type="slidenum">
+              <a:rPr b="0" lang="en-US"/>
+              <a:t>6</a:t>
+            </a:fld>
+            <a:endParaRPr lang="en-US"/>
+          </a:p>
+        </p:txBody>
+      </p:sp>
+    </p:spTree>
+  </p:cSld>
+  <p:clrMapOvr>
+    <a:masterClrMapping/>
+  </p:clrMapOvr>
+</p:sld>
+</file>
+
+<file path=ppt/slides/slide7.xml><?xml version="1.0" encoding="utf-8"?>
+<p:sld xmlns:a="http://schemas.openxmlformats.org/drawingml/2006/main" xmlns:r="http://schemas.openxmlformats.org/officeDocument/2006/relationships" xmlns:p="http://schemas.openxmlformats.org/presentationml/2006/main">
+  <p:cSld name="Slide 7">
+    <p:spTree>
+      <p:nvGrpSpPr>
+        <p:cNvPr id="1" name=""/>
+        <p:cNvGrpSpPr/>
+        <p:nvPr/>
+      </p:nvGrpSpPr>
+      <p:grpSpPr>
+        <a:xfrm>
+          <a:off x="0" y="0"/>
+          <a:ext cx="0" cy="0"/>
+          <a:chOff x="0" y="0"/>
+          <a:chExt cx="0" cy="0"/>
+        </a:xfrm>
+      </p:grpSpPr>
+      <p:sp>
+        <p:nvSpPr>
+          <p:cNvPr id="2" name="Text 0"/>
+          <p:cNvSpPr/>
+          <p:nvPr>
+            <p:ph idx="100" type="title" hasCustomPrompt="1"/>
+          </p:nvPr>
+        </p:nvSpPr>
+        <p:spPr>
+          <a:xfrm>
+            <a:off x="457200" y="274320"/>
+            <a:ext cx="8229600" cy="685800"/>
+          </a:xfrm>
+          <a:prstGeom prst="rect">
+            <a:avLst/>
+          </a:prstGeom>
+          <a:noFill/>
+          <a:ln/>
+        </p:spPr>
+        <p:txBody>
+          <a:bodyPr wrap="square" rtlCol="0"/>
+          <a:lstStyle/>
+          <a:p>
+            <a:pPr rtl="1" algn="r" indent="0" marL="0">
+              <a:buNone/>
+            </a:pPr>
+            <a:r>
+              <a:rPr lang="en-US" sz="3000" b="1" dirty="0">
+                <a:solidFill>
+                  <a:schemeClr val="tx2"/>
+                </a:solidFill>
+              </a:rPr>
+              <a:t>تمرين الفصلين 10 و11: الانتقال والحركة</a:t>
             </a:r>
             <a:endParaRPr lang="en-US" sz="3000" dirty="0"/>
           </a:p>
@@ -3883,7 +4264,7 @@
             <a:pPr algn="l"/>
             <a:fld id="{F7021451-1387-4CA6-816F-3879F97B5CBC}" type="slidenum">
               <a:rPr b="0" lang="en-US"/>
-              <a:t>6</a:t>
+              <a:t>7</a:t>
             </a:fld>
             <a:endParaRPr lang="en-US"/>
           </a:p>
